--- a/AI_Carrer_Guidance_presentation [Repaired].pptx
+++ b/AI_Carrer_Guidance_presentation [Repaired].pptx
@@ -2246,7 +2246,7 @@
         </p:nvSpPr>
         <p:spPr>
           <a:xfrm>
-            <a:off x="960120" y="1005840"/>
+            <a:off x="960120" y="1506894"/>
             <a:ext cx="10241280" cy="502920"/>
           </a:xfrm>
           <a:prstGeom prst="rect">
@@ -2263,17 +2263,15 @@
               <a:buNone/>
             </a:pPr>
             <a:r>
-              <a:rPr lang="en-US" sz="2600" b="1" dirty="0">
+              <a:rPr lang="en-US" sz="3600" b="1" dirty="0">
                 <a:solidFill>
                   <a:srgbClr val="0F766E"/>
                 </a:solidFill>
                 <a:latin typeface="Aptos Display" pitchFamily="34" charset="0"/>
-                <a:ea typeface="Aptos Display" pitchFamily="34" charset="-122"/>
-                <a:cs typeface="Aptos Display" pitchFamily="34" charset="-120"/>
               </a:rPr>
-              <a:t>B.Tech CSBS</a:t>
+              <a:t>Project Presentation</a:t>
             </a:r>
-            <a:endParaRPr lang="en-US" sz="2600" dirty="0"/>
+            <a:endParaRPr lang="en-US" sz="3600" dirty="0"/>
           </a:p>
         </p:txBody>
       </p:sp>
@@ -2287,6 +2285,36 @@
           <a:xfrm>
             <a:off x="960120" y="1600200"/>
             <a:ext cx="10241280" cy="594360"/>
+          </a:xfrm>
+          <a:prstGeom prst="rect">
+            <a:avLst/>
+          </a:prstGeom>
+          <a:noFill/>
+          <a:ln/>
+        </p:spPr>
+        <p:txBody>
+          <a:bodyPr wrap="square" lIns="0" tIns="0" rIns="0" bIns="0" rtlCol="0" anchor="ctr">
+            <a:normAutofit/>
+          </a:bodyPr>
+          <a:lstStyle/>
+          <a:p>
+            <a:pPr marL="0" indent="0">
+              <a:buNone/>
+            </a:pPr>
+            <a:endParaRPr lang="en-US" sz="3200" dirty="0"/>
+          </a:p>
+        </p:txBody>
+      </p:sp>
+      <p:sp>
+        <p:nvSpPr>
+          <p:cNvPr id="6" name="Text 4"/>
+          <p:cNvSpPr/>
+          <p:nvPr/>
+        </p:nvSpPr>
+        <p:spPr>
+          <a:xfrm>
+            <a:off x="960120" y="2377440"/>
+            <a:ext cx="10241280" cy="1051560"/>
           </a:xfrm>
           <a:prstGeom prst="rect">
             <a:avLst/>
@@ -2308,71 +2336,34 @@
                 <a:solidFill>
                   <a:srgbClr val="0B1F33"/>
                 </a:solidFill>
-                <a:latin typeface="Aptos Display" pitchFamily="34" charset="0"/>
+                <a:latin typeface="Alef" panose="00000500000000000000" pitchFamily="2" charset="-79"/>
                 <a:ea typeface="Aptos Display" pitchFamily="34" charset="-122"/>
-                <a:cs typeface="Aptos Display" pitchFamily="34" charset="-120"/>
+                <a:cs typeface="Alef" panose="00000500000000000000" pitchFamily="2" charset="-79"/>
               </a:rPr>
-              <a:t>Semester VIII Final Project Presentation</a:t>
+              <a:t>Project Title: AI Based Career Guidance</a:t>
             </a:r>
-            <a:endParaRPr lang="en-US" sz="3200" dirty="0"/>
-          </a:p>
-        </p:txBody>
-      </p:sp>
-      <p:sp>
-        <p:nvSpPr>
-          <p:cNvPr id="6" name="Text 4"/>
-          <p:cNvSpPr/>
-          <p:nvPr/>
-        </p:nvSpPr>
-        <p:spPr>
-          <a:xfrm>
-            <a:off x="960120" y="2377440"/>
-            <a:ext cx="10241280" cy="1051560"/>
-          </a:xfrm>
-          <a:prstGeom prst="rect">
-            <a:avLst/>
-          </a:prstGeom>
-          <a:noFill/>
-          <a:ln/>
-        </p:spPr>
-        <p:txBody>
-          <a:bodyPr wrap="square" lIns="0" tIns="0" rIns="0" bIns="0" rtlCol="0" anchor="ctr">
-            <a:normAutofit/>
-          </a:bodyPr>
-          <a:lstStyle/>
-          <a:p>
-            <a:pPr marL="0" indent="0">
-              <a:buNone/>
-            </a:pPr>
+            <a:r>
+              <a:rPr lang="en-US" sz="3200" dirty="0">
+                <a:latin typeface="Alef" panose="00000500000000000000" pitchFamily="2" charset="-79"/>
+                <a:cs typeface="Alef" panose="00000500000000000000" pitchFamily="2" charset="-79"/>
+              </a:rPr>
+              <a:t> </a:t>
+            </a:r>
             <a:r>
               <a:rPr lang="en-US" sz="3200" b="1" dirty="0">
                 <a:solidFill>
                   <a:srgbClr val="0B1F33"/>
                 </a:solidFill>
-                <a:latin typeface="Aptos Display" pitchFamily="34" charset="0"/>
+                <a:latin typeface="Alef" panose="00000500000000000000" pitchFamily="2" charset="-79"/>
                 <a:ea typeface="Aptos Display" pitchFamily="34" charset="-122"/>
-                <a:cs typeface="Aptos Display" pitchFamily="34" charset="-120"/>
-              </a:rPr>
-              <a:t>Project Title: AI Based Career Guidance</a:t>
-            </a:r>
-            <a:endParaRPr lang="en-US" sz="3200" dirty="0"/>
-          </a:p>
-          <a:p>
-            <a:pPr marL="0" indent="0">
-              <a:buNone/>
-            </a:pPr>
-            <a:r>
-              <a:rPr lang="en-US" sz="3200" b="1" dirty="0">
-                <a:solidFill>
-                  <a:srgbClr val="0B1F33"/>
-                </a:solidFill>
-                <a:latin typeface="Aptos Display" pitchFamily="34" charset="0"/>
-                <a:ea typeface="Aptos Display" pitchFamily="34" charset="-122"/>
-                <a:cs typeface="Aptos Display" pitchFamily="34" charset="-120"/>
+                <a:cs typeface="Alef" panose="00000500000000000000" pitchFamily="2" charset="-79"/>
               </a:rPr>
               <a:t>System</a:t>
             </a:r>
-            <a:endParaRPr lang="en-US" sz="3200" dirty="0"/>
+            <a:endParaRPr lang="en-US" sz="3200" dirty="0">
+              <a:latin typeface="Alef" panose="00000500000000000000" pitchFamily="2" charset="-79"/>
+              <a:cs typeface="Alef" panose="00000500000000000000" pitchFamily="2" charset="-79"/>
+            </a:endParaRPr>
           </a:p>
         </p:txBody>
       </p:sp>
@@ -2384,8 +2375,8 @@
         </p:nvSpPr>
         <p:spPr>
           <a:xfrm>
-            <a:off x="960120" y="3886200"/>
-            <a:ext cx="5669280" cy="1325880"/>
+            <a:off x="960120" y="3760237"/>
+            <a:ext cx="5669280" cy="1800808"/>
           </a:xfrm>
           <a:prstGeom prst="roundRect">
             <a:avLst>
@@ -2429,15 +2420,18 @@
         </p:spPr>
         <p:txBody>
           <a:bodyPr wrap="square" lIns="254" tIns="254" rIns="254" bIns="254" rtlCol="0" anchor="ctr">
-            <a:normAutofit/>
+            <a:noAutofit/>
           </a:bodyPr>
           <a:lstStyle/>
           <a:p>
             <a:pPr marL="0" indent="0">
+              <a:lnSpc>
+                <a:spcPct val="150000"/>
+              </a:lnSpc>
               <a:buNone/>
             </a:pPr>
             <a:r>
-              <a:rPr lang="en-US" sz="1500" b="1" dirty="0">
+              <a:rPr lang="en-US" sz="1600" b="1" dirty="0">
                 <a:solidFill>
                   <a:srgbClr val="475569"/>
                 </a:solidFill>
@@ -2445,157 +2439,60 @@
                 <a:ea typeface="Aptos" pitchFamily="34" charset="-122"/>
                 <a:cs typeface="Aptos" pitchFamily="34" charset="-120"/>
               </a:rPr>
-              <a:t>Presented by : </a:t>
+              <a:t>Presented by :</a:t>
             </a:r>
+          </a:p>
+          <a:p>
+            <a:pPr marL="0" indent="0">
+              <a:lnSpc>
+                <a:spcPct val="150000"/>
+              </a:lnSpc>
+              <a:buNone/>
+            </a:pPr>
             <a:r>
-              <a:rPr lang="en-US" sz="1500" dirty="0">
+              <a:rPr lang="en-US" sz="1600" b="1" dirty="0">
                 <a:solidFill>
                   <a:srgbClr val="475569"/>
                 </a:solidFill>
                 <a:latin typeface="Aptos" pitchFamily="34" charset="0"/>
-                <a:ea typeface="Aptos" pitchFamily="34" charset="-122"/>
-                <a:cs typeface="Aptos" pitchFamily="34" charset="-120"/>
               </a:rPr>
-              <a:t>Rajashree Pati (E036)</a:t>
+              <a:t>Monowar Hossain Aman</a:t>
             </a:r>
-            <a:endParaRPr lang="en-US" sz="1500" dirty="0"/>
           </a:p>
           <a:p>
             <a:pPr marL="0" indent="0">
+              <a:lnSpc>
+                <a:spcPct val="150000"/>
+              </a:lnSpc>
               <a:buNone/>
             </a:pPr>
             <a:r>
-              <a:rPr lang="en-US" sz="1500" dirty="0">
+              <a:rPr lang="en-US" sz="1600" b="1" dirty="0">
                 <a:solidFill>
                   <a:srgbClr val="475569"/>
                 </a:solidFill>
                 <a:latin typeface="Aptos" pitchFamily="34" charset="0"/>
-                <a:ea typeface="Aptos" pitchFamily="34" charset="-122"/>
-                <a:cs typeface="Aptos" pitchFamily="34" charset="-120"/>
               </a:rPr>
-              <a:t>Aishwarya Pimplikar (E037)</a:t>
+              <a:t>-</a:t>
             </a:r>
-            <a:endParaRPr lang="en-US" sz="1500" dirty="0"/>
           </a:p>
           <a:p>
             <a:pPr marL="0" indent="0">
+              <a:lnSpc>
+                <a:spcPct val="150000"/>
+              </a:lnSpc>
               <a:buNone/>
             </a:pPr>
             <a:r>
-              <a:rPr lang="en-US" sz="1500" dirty="0">
+              <a:rPr lang="en-US" sz="1600" b="1" dirty="0">
                 <a:solidFill>
                   <a:srgbClr val="475569"/>
                 </a:solidFill>
                 <a:latin typeface="Aptos" pitchFamily="34" charset="0"/>
-                <a:ea typeface="Aptos" pitchFamily="34" charset="-122"/>
-                <a:cs typeface="Aptos" pitchFamily="34" charset="-120"/>
               </a:rPr>
-              <a:t>Amanpreet Singh (E052)</a:t>
+              <a:t>-</a:t>
             </a:r>
-            <a:endParaRPr lang="en-US" sz="1500" dirty="0"/>
-          </a:p>
-          <a:p>
-            <a:pPr marL="0" indent="0">
-              <a:buNone/>
-            </a:pPr>
-            <a:r>
-              <a:rPr lang="en-US" sz="1500" dirty="0">
-                <a:solidFill>
-                  <a:srgbClr val="475569"/>
-                </a:solidFill>
-                <a:latin typeface="Aptos" pitchFamily="34" charset="0"/>
-                <a:ea typeface="Aptos" pitchFamily="34" charset="-122"/>
-                <a:cs typeface="Aptos" pitchFamily="34" charset="-120"/>
-              </a:rPr>
-              <a:t>Arya Shah (E071)</a:t>
-            </a:r>
-            <a:endParaRPr lang="en-US" sz="1500" dirty="0"/>
-          </a:p>
-        </p:txBody>
-      </p:sp>
-      <p:sp>
-        <p:nvSpPr>
-          <p:cNvPr id="9" name="Shape 7"/>
-          <p:cNvSpPr/>
-          <p:nvPr/>
-        </p:nvSpPr>
-        <p:spPr>
-          <a:xfrm>
-            <a:off x="6903720" y="3886200"/>
-            <a:ext cx="4114800" cy="1325880"/>
-          </a:xfrm>
-          <a:prstGeom prst="roundRect">
-            <a:avLst>
-              <a:gd name="adj" fmla="val 5517"/>
-            </a:avLst>
-          </a:prstGeom>
-          <a:solidFill>
-            <a:srgbClr val="ECFEFF"/>
-          </a:solidFill>
-          <a:ln w="12700">
-            <a:solidFill>
-              <a:srgbClr val="E2E8F0"/>
-            </a:solidFill>
-            <a:prstDash val="solid"/>
-          </a:ln>
-          <a:effectLst>
-            <a:outerShdw blurRad="12700" dist="50800" dir="2700000" algn="bl" rotWithShape="0">
-              <a:srgbClr val="000000">
-                <a:alpha val="10000"/>
-              </a:srgbClr>
-            </a:outerShdw>
-          </a:effectLst>
-        </p:spPr>
-      </p:sp>
-      <p:sp>
-        <p:nvSpPr>
-          <p:cNvPr id="10" name="Text 8"/>
-          <p:cNvSpPr/>
-          <p:nvPr/>
-        </p:nvSpPr>
-        <p:spPr>
-          <a:xfrm>
-            <a:off x="7223760" y="4343400"/>
-            <a:ext cx="3566160" cy="365760"/>
-          </a:xfrm>
-          <a:prstGeom prst="rect">
-            <a:avLst/>
-          </a:prstGeom>
-          <a:noFill/>
-          <a:ln/>
-        </p:spPr>
-        <p:txBody>
-          <a:bodyPr wrap="square" lIns="254" tIns="254" rIns="254" bIns="254" rtlCol="0" anchor="ctr">
-            <a:normAutofit fontScale="92500"/>
-          </a:bodyPr>
-          <a:lstStyle/>
-          <a:p>
-            <a:pPr marL="0" indent="0">
-              <a:buNone/>
-            </a:pPr>
-            <a:r>
-              <a:rPr lang="en-US" sz="1500" b="1" dirty="0">
-                <a:solidFill>
-                  <a:srgbClr val="475569"/>
-                </a:solidFill>
-                <a:latin typeface="Aptos" pitchFamily="34" charset="0"/>
-                <a:ea typeface="Aptos" pitchFamily="34" charset="-122"/>
-                <a:cs typeface="Aptos" pitchFamily="34" charset="-120"/>
-              </a:rPr>
-              <a:t>Under the guidance of : </a:t>
-            </a:r>
-            <a:r>
-              <a:rPr lang="en-US" sz="1500" dirty="0">
-                <a:solidFill>
-                  <a:srgbClr val="475569"/>
-                </a:solidFill>
-                <a:latin typeface="Aptos" pitchFamily="34" charset="0"/>
-                <a:ea typeface="Aptos" pitchFamily="34" charset="-122"/>
-                <a:cs typeface="Aptos" pitchFamily="34" charset="-120"/>
-              </a:rPr>
-              <a:t>Dr. Shubha Puthran</a:t>
-            </a:r>
-            <a:endParaRPr lang="en-US" sz="1500" dirty="0"/>
+            <a:endParaRPr lang="en-US" sz="1600" dirty="0"/>
           </a:p>
         </p:txBody>
       </p:sp>
